--- a/dist/초5/국어/독서와추론/초5_국어_독서와추론_03_구조에따라요약하기.pptx
+++ b/dist/초5/국어/독서와추론/초5_국어_독서와추론_03_구조에따라요약하기.pptx
@@ -120,13 +120,13 @@
   <p:extLst>
     <p:ext uri="{521415D9-36F7-43E2-AB2F-B90AF26B5E84}">
       <p14:sectionLst xmlns:p14="http://schemas.microsoft.com/office/powerpoint/2010/main">
-        <p14:section name="도입" id="{b1d85664-f2d3-5207-419e-41cd32a674bb}">
+        <p14:section name="도입" id="{96ce2321-3dd1-af56-c59e-82bb1ae593c8}">
           <p14:sldIdLst>
             <p14:sldId id="256"/>
             <p14:sldId id="257"/>
           </p14:sldIdLst>
         </p14:section>
-        <p14:section name="개념" id="{ad3dddae-e789-caca-e371-5e1ac1d11877}">
+        <p14:section name="개념" id="{5f4c1c38-be83-3f23-7624-1c1f1198766a}">
           <p14:sldIdLst>
             <p14:sldId id="258"/>
             <p14:sldId id="259"/>
@@ -134,26 +134,26 @@
             <p14:sldId id="261"/>
           </p14:sldIdLst>
         </p14:section>
-        <p14:section name="연습" id="{1f112f99-8976-15a8-97a2-c255386a8cbe}">
+        <p14:section name="연습" id="{b91ce863-dbe0-7a65-d25c-a2fa171bfaaf}">
           <p14:sldIdLst>
             <p14:sldId id="262"/>
             <p14:sldId id="263"/>
             <p14:sldId id="264"/>
           </p14:sldIdLst>
         </p14:section>
-        <p14:section name="확인" id="{4c599261-8f2c-410b-966d-e9846af63512}">
+        <p14:section name="확인" id="{48bc79e1-44b8-e437-cc82-35db7a0e6ba9}">
           <p14:sldIdLst>
             <p14:sldId id="265"/>
             <p14:sldId id="266"/>
             <p14:sldId id="267"/>
           </p14:sldIdLst>
         </p14:section>
-        <p14:section name="정리" id="{8497aa70-5646-c01b-b7ea-b8061b0c9466}">
+        <p14:section name="정리" id="{e4e78e67-4e5c-ae6f-e595-0d03ec3efe44}">
           <p14:sldIdLst>
             <p14:sldId id="268"/>
           </p14:sldIdLst>
         </p14:section>
-        <p14:section name="보충" id="{d0342a07-7890-cedd-b9cc-fbc54ddf77de}">
+        <p14:section name="보충" id="{ea1c78a3-a491-399b-e34e-22cae99779f6}">
           <p14:sldIdLst>
             <p14:sldId id="269"/>
           </p14:sldIdLst>
